--- a/Teaching/Compile Time Errrors/problem_session_3_state_machine.pptx
+++ b/Teaching/Compile Time Errrors/problem_session_3_state_machine.pptx
@@ -4,6 +4,9 @@
   <p:sldMasterIdLst>
     <p:sldMasterId id="2147483648" r:id="rId1"/>
   </p:sldMasterIdLst>
+  <p:notesMasterIdLst>
+    <p:notesMasterId r:id="rId9"/>
+  </p:notesMasterIdLst>
   <p:sldIdLst>
     <p:sldId id="256" r:id="rId2"/>
     <p:sldId id="257" r:id="rId3"/>
@@ -13,10 +16,7 @@
     <p:sldId id="261" r:id="rId7"/>
     <p:sldId id="262" r:id="rId8"/>
   </p:sldIdLst>
-  <p:notesMasterIdLst>
-    <p:notesMasterId r:id="rId9"/>
-  </p:notesMasterIdLst>
-  <p:sldSz cx="9144000" cy="5143500"/>
+  <p:sldSz cx="9144000" cy="5143500" type="screen16x9"/>
   <p:notesSz cx="5143500" cy="9144000"/>
   <p:defaultTextStyle>
     <a:lvl1pPr marL="0" algn="l" defTabSz="914400" rtl="0" eaLnBrk="1" latinLnBrk="0" hangingPunct="1">
@@ -110,6 +110,11 @@
       </a:defRPr>
     </a:lvl9pPr>
   </p:defaultTextStyle>
+  <p:extLst>
+    <p:ext uri="{EFAFB233-063F-42B5-8137-9DF3F51BA10A}">
+      <p15:sldGuideLst xmlns:p15="http://schemas.microsoft.com/office/powerpoint/2012/main"/>
+    </p:ext>
+  </p:extLst>
 </p:presentation>
 </file>
 
@@ -135,234 +140,10 @@
           <a:chExt cx="0" cy="0"/>
         </a:xfrm>
       </p:grpSpPr>
-      <p:sp>
-        <p:nvSpPr>
-          <p:cNvPr id="2" name="Header Placeholder 1"/>
-          <p:cNvSpPr>
-            <a:spLocks noGrp="1"/>
-          </p:cNvSpPr>
-          <p:nvPr>
-            <p:ph type="hdr" sz="quarter"/>
-          </p:nvPr>
-        </p:nvSpPr>
-        <p:spPr>
-          <a:xfrm>
-            <a:off x="0" y="0"/>
-            <a:ext cx="2971800" cy="458788"/>
-          </a:xfrm>
-          <a:prstGeom prst="rect">
-            <a:avLst/>
-          </a:prstGeom>
-        </p:spPr>
-        <p:txBody>
-          <a:bodyPr vert="horz" lIns="91440" tIns="45720" rIns="91440" bIns="45720" rtlCol="0"/>
-          <a:lstStyle>
-            <a:lvl1pPr algn="l">
-              <a:defRPr sz="1200"/>
-            </a:lvl1pPr>
-          </a:lstStyle>
-          <a:p>
-            <a:endParaRPr lang="en-US"/>
-          </a:p>
-        </p:txBody>
-      </p:sp>
-      <p:sp>
-        <p:nvSpPr>
-          <p:cNvPr id="3" name="Date Placeholder 2"/>
-          <p:cNvSpPr>
-            <a:spLocks noGrp="1"/>
-          </p:cNvSpPr>
-          <p:nvPr>
-            <p:ph type="dt" idx="1"/>
-          </p:nvPr>
-        </p:nvSpPr>
-        <p:spPr>
-          <a:xfrm>
-            <a:off x="3884613" y="0"/>
-            <a:ext cx="2971800" cy="458788"/>
-          </a:xfrm>
-          <a:prstGeom prst="rect">
-            <a:avLst/>
-          </a:prstGeom>
-        </p:spPr>
-        <p:txBody>
-          <a:bodyPr vert="horz" lIns="91440" tIns="45720" rIns="91440" bIns="45720" rtlCol="0"/>
-          <a:lstStyle>
-            <a:lvl1pPr algn="r">
-              <a:defRPr sz="1200"/>
-            </a:lvl1pPr>
-          </a:lstStyle>
-          <a:p>
-            <a:fld id="{5282F153-3F37-0F45-9E97-73ACFA13230C}" type="datetimeFigureOut">
-              <a:rPr lang="en-US"/>
-              <a:t>7/23/19</a:t>
-            </a:fld>
-            <a:endParaRPr lang="en-US"/>
-          </a:p>
-        </p:txBody>
-      </p:sp>
-      <p:sp>
-        <p:nvSpPr>
-          <p:cNvPr id="4" name="Slide Image Placeholder 3"/>
-          <p:cNvSpPr>
-            <a:spLocks noGrp="1" noRot="1" noChangeAspect="1"/>
-          </p:cNvSpPr>
-          <p:nvPr>
-            <p:ph type="sldImg" idx="2"/>
-          </p:nvPr>
-        </p:nvSpPr>
-        <p:spPr>
-          <a:xfrm>
-            <a:off x="685800" y="1143000"/>
-            <a:ext cx="5486400" cy="3086100"/>
-          </a:xfrm>
-          <a:prstGeom prst="rect">
-            <a:avLst/>
-          </a:prstGeom>
-          <a:noFill/>
-          <a:ln w="12700">
-            <a:solidFill>
-              <a:prstClr val="black"/>
-            </a:solidFill>
-          </a:ln>
-        </p:spPr>
-        <p:txBody>
-          <a:bodyPr vert="horz" lIns="91440" tIns="45720" rIns="91440" bIns="45720" rtlCol="0" anchor="ctr"/>
-          <a:lstStyle/>
-          <a:p>
-            <a:endParaRPr lang="en-US"/>
-          </a:p>
-        </p:txBody>
-      </p:sp>
-      <p:sp>
-        <p:nvSpPr>
-          <p:cNvPr id="5" name="Notes Placeholder 4"/>
-          <p:cNvSpPr>
-            <a:spLocks noGrp="1"/>
-          </p:cNvSpPr>
-          <p:nvPr>
-            <p:ph type="body" sz="quarter" idx="3"/>
-          </p:nvPr>
-        </p:nvSpPr>
-        <p:spPr>
-          <a:xfrm>
-            <a:off x="685800" y="4400550"/>
-            <a:ext cx="5486400" cy="3600450"/>
-          </a:xfrm>
-          <a:prstGeom prst="rect">
-            <a:avLst/>
-          </a:prstGeom>
-        </p:spPr>
-        <p:txBody>
-          <a:bodyPr vert="horz" lIns="91440" tIns="45720" rIns="91440" bIns="45720" rtlCol="0"/>
-          <a:lstStyle/>
-          <a:p>
-            <a:pPr lvl="0"/>
-            <a:r>
-              <a:rPr lang="en-US"/>
-              <a:t>Click to edit Master text styles</a:t>
-            </a:r>
-          </a:p>
-          <a:p>
-            <a:pPr lvl="1"/>
-            <a:r>
-              <a:rPr lang="en-US"/>
-              <a:t>Second level</a:t>
-            </a:r>
-          </a:p>
-          <a:p>
-            <a:pPr lvl="2"/>
-            <a:r>
-              <a:rPr lang="en-US"/>
-              <a:t>Third level</a:t>
-            </a:r>
-          </a:p>
-          <a:p>
-            <a:pPr lvl="3"/>
-            <a:r>
-              <a:rPr lang="en-US"/>
-              <a:t>Fourth level</a:t>
-            </a:r>
-          </a:p>
-          <a:p>
-            <a:pPr lvl="4"/>
-            <a:r>
-              <a:rPr lang="en-US"/>
-              <a:t>Fifth level</a:t>
-            </a:r>
-          </a:p>
-        </p:txBody>
-      </p:sp>
-      <p:sp>
-        <p:nvSpPr>
-          <p:cNvPr id="6" name="Footer Placeholder 5"/>
-          <p:cNvSpPr>
-            <a:spLocks noGrp="1"/>
-          </p:cNvSpPr>
-          <p:nvPr>
-            <p:ph type="ftr" sz="quarter" idx="4"/>
-          </p:nvPr>
-        </p:nvSpPr>
-        <p:spPr>
-          <a:xfrm>
-            <a:off x="0" y="8685213"/>
-            <a:ext cx="2971800" cy="458787"/>
-          </a:xfrm>
-          <a:prstGeom prst="rect">
-            <a:avLst/>
-          </a:prstGeom>
-        </p:spPr>
-        <p:txBody>
-          <a:bodyPr vert="horz" lIns="91440" tIns="45720" rIns="91440" bIns="45720" rtlCol="0" anchor="b"/>
-          <a:lstStyle>
-            <a:lvl1pPr algn="l">
-              <a:defRPr sz="1200"/>
-            </a:lvl1pPr>
-          </a:lstStyle>
-          <a:p>
-            <a:endParaRPr lang="en-US"/>
-          </a:p>
-        </p:txBody>
-      </p:sp>
-      <p:sp>
-        <p:nvSpPr>
-          <p:cNvPr id="7" name="Slide Number Placeholder 6"/>
-          <p:cNvSpPr>
-            <a:spLocks noGrp="1"/>
-          </p:cNvSpPr>
-          <p:nvPr>
-            <p:ph type="sldNum" sz="quarter" idx="5"/>
-          </p:nvPr>
-        </p:nvSpPr>
-        <p:spPr>
-          <a:xfrm>
-            <a:off x="3884613" y="8685213"/>
-            <a:ext cx="2971800" cy="458787"/>
-          </a:xfrm>
-          <a:prstGeom prst="rect">
-            <a:avLst/>
-          </a:prstGeom>
-        </p:spPr>
-        <p:txBody>
-          <a:bodyPr vert="horz" lIns="91440" tIns="45720" rIns="91440" bIns="45720" rtlCol="0" anchor="b"/>
-          <a:lstStyle>
-            <a:lvl1pPr algn="r">
-              <a:defRPr sz="1200"/>
-            </a:lvl1pPr>
-          </a:lstStyle>
-          <a:p>
-            <a:fld id="{CE5E9CC1-C706-0F49-92D6-E571CC5EEA8F}" type="slidenum">
-              <a:rPr lang="en-US"/>
-              <a:t>‹#›</a:t>
-            </a:fld>
-            <a:endParaRPr lang="en-US"/>
-          </a:p>
-        </p:txBody>
-      </p:sp>
     </p:spTree>
     <p:extLst>
       <p:ext uri="{BB962C8B-B14F-4D97-AF65-F5344CB8AC3E}">
-        <p14:creationId xmlns:p14="http://schemas.microsoft.com/office/powerpoint/2010/main" val="1024086991"/>
+        <p14:creationId xmlns:p14="http://schemas.microsoft.com/office/powerpoint/2010/main" val="3828135747"/>
       </p:ext>
     </p:extLst>
   </p:cSld>
@@ -506,10 +287,6 @@
           <a:bodyPr/>
           <a:lstStyle/>
           <a:p>
-            <a:r>
-              <a:rPr lang="en-US" dirty="0"/>
-              <a:t/>
-            </a:r>
             <a:endParaRPr lang="en-US" dirty="0"/>
           </a:p>
         </p:txBody>
@@ -594,10 +371,6 @@
           <a:bodyPr/>
           <a:lstStyle/>
           <a:p>
-            <a:r>
-              <a:rPr lang="en-US" dirty="0"/>
-              <a:t/>
-            </a:r>
             <a:endParaRPr lang="en-US" dirty="0"/>
           </a:p>
         </p:txBody>
@@ -682,10 +455,6 @@
           <a:bodyPr/>
           <a:lstStyle/>
           <a:p>
-            <a:r>
-              <a:rPr lang="en-US" dirty="0"/>
-              <a:t/>
-            </a:r>
             <a:endParaRPr lang="en-US" dirty="0"/>
           </a:p>
         </p:txBody>
@@ -770,10 +539,6 @@
           <a:bodyPr/>
           <a:lstStyle/>
           <a:p>
-            <a:r>
-              <a:rPr lang="en-US" dirty="0"/>
-              <a:t/>
-            </a:r>
             <a:endParaRPr lang="en-US" dirty="0"/>
           </a:p>
         </p:txBody>
@@ -858,10 +623,6 @@
           <a:bodyPr/>
           <a:lstStyle/>
           <a:p>
-            <a:r>
-              <a:rPr lang="en-US" dirty="0"/>
-              <a:t/>
-            </a:r>
             <a:endParaRPr lang="en-US" dirty="0"/>
           </a:p>
         </p:txBody>
@@ -946,10 +707,6 @@
           <a:bodyPr/>
           <a:lstStyle/>
           <a:p>
-            <a:r>
-              <a:rPr lang="en-US" dirty="0"/>
-              <a:t/>
-            </a:r>
             <a:endParaRPr lang="en-US" dirty="0"/>
           </a:p>
         </p:txBody>
@@ -1034,10 +791,6 @@
           <a:bodyPr/>
           <a:lstStyle/>
           <a:p>
-            <a:r>
-              <a:rPr lang="en-US" dirty="0"/>
-              <a:t/>
-            </a:r>
             <a:endParaRPr lang="en-US" dirty="0"/>
           </a:p>
         </p:txBody>
@@ -1111,6 +864,11 @@
 <file path=ppt/slideMasters/slideMaster1.xml><?xml version="1.0" encoding="utf-8"?>
 <p:sldMaster xmlns:a="http://schemas.openxmlformats.org/drawingml/2006/main" xmlns:r="http://schemas.openxmlformats.org/officeDocument/2006/relationships" xmlns:p="http://schemas.openxmlformats.org/presentationml/2006/main">
   <p:cSld>
+    <p:bg>
+      <p:bgRef idx="1001">
+        <a:schemeClr val="bg1"/>
+      </p:bgRef>
+    </p:bg>
     <p:spTree>
       <p:nvGrpSpPr>
         <p:cNvPr id="1" name=""/>
@@ -1393,6 +1151,7 @@
         <a:solidFill>
           <a:srgbClr val="0D1117"/>
         </a:solidFill>
+        <a:effectLst/>
       </p:bgPr>
     </p:bg>
     <p:spTree>
@@ -1430,7 +1189,7 @@
           <a:bodyPr wrap="square" rtlCol="0" anchor="ctr"/>
           <a:lstStyle/>
           <a:p>
-            <a:pPr algn="ctr" indent="0" marL="0">
+            <a:pPr marL="0" indent="0" algn="ctr">
               <a:buNone/>
             </a:pPr>
             <a:r>
@@ -1466,7 +1225,7 @@
           <a:bodyPr wrap="square" rtlCol="0" anchor="ctr"/>
           <a:lstStyle/>
           <a:p>
-            <a:pPr algn="ctr" indent="0" marL="0">
+            <a:pPr marL="0" indent="0" algn="ctr">
               <a:buNone/>
             </a:pPr>
             <a:r>
@@ -1502,7 +1261,7 @@
           <a:bodyPr wrap="square" rtlCol="0" anchor="ctr"/>
           <a:lstStyle/>
           <a:p>
-            <a:pPr algn="ctr" indent="0" marL="0">
+            <a:pPr marL="0" indent="0" algn="ctr">
               <a:buNone/>
             </a:pPr>
             <a:r>
@@ -1536,6 +1295,13 @@
           </a:solidFill>
           <a:ln/>
         </p:spPr>
+        <p:txBody>
+          <a:bodyPr/>
+          <a:lstStyle/>
+          <a:p>
+            <a:endParaRPr/>
+          </a:p>
+        </p:txBody>
       </p:sp>
     </p:spTree>
   </p:cSld>
@@ -1553,6 +1319,7 @@
         <a:solidFill>
           <a:srgbClr val="0D1117"/>
         </a:solidFill>
+        <a:effectLst/>
       </p:bgPr>
     </p:bg>
     <p:spTree>
@@ -1590,7 +1357,7 @@
           <a:bodyPr wrap="square" rtlCol="0" anchor="ctr"/>
           <a:lstStyle/>
           <a:p>
-            <a:pPr indent="0" marL="0">
+            <a:pPr marL="0" indent="0">
               <a:buNone/>
             </a:pPr>
             <a:r>
@@ -1629,7 +1396,7 @@
           <a:bodyPr wrap="square" rtlCol="0" anchor="ctr"/>
           <a:lstStyle/>
           <a:p>
-            <a:pPr indent="0" marL="0">
+            <a:pPr marL="0" indent="0">
               <a:buNone/>
             </a:pPr>
             <a:r>
@@ -1655,7 +1422,7 @@
         </p:nvSpPr>
         <p:spPr>
           <a:xfrm>
-            <a:off x="365760" y="1005840"/>
+            <a:off x="365760" y="1053251"/>
             <a:ext cx="5120640" cy="3108960"/>
           </a:xfrm>
           <a:prstGeom prst="rect">
@@ -1671,6 +1438,13 @@
             <a:prstDash val="solid"/>
           </a:ln>
         </p:spPr>
+        <p:txBody>
+          <a:bodyPr/>
+          <a:lstStyle/>
+          <a:p>
+            <a:endParaRPr/>
+          </a:p>
+        </p:txBody>
       </p:sp>
       <p:sp>
         <p:nvSpPr>
@@ -1680,7 +1454,7 @@
         </p:nvSpPr>
         <p:spPr>
           <a:xfrm>
-            <a:off x="365760" y="1005840"/>
+            <a:off x="365760" y="1053251"/>
             <a:ext cx="36576" cy="3108960"/>
           </a:xfrm>
           <a:prstGeom prst="rect">
@@ -1691,6 +1465,13 @@
           </a:solidFill>
           <a:ln/>
         </p:spPr>
+        <p:txBody>
+          <a:bodyPr/>
+          <a:lstStyle/>
+          <a:p>
+            <a:endParaRPr/>
+          </a:p>
+        </p:txBody>
       </p:sp>
       <p:sp>
         <p:nvSpPr>
@@ -1700,7 +1481,7 @@
         </p:nvSpPr>
         <p:spPr>
           <a:xfrm>
-            <a:off x="502920" y="1097280"/>
+            <a:off x="502920" y="1144691"/>
             <a:ext cx="4892040" cy="2926080"/>
           </a:xfrm>
           <a:prstGeom prst="rect">
@@ -1713,7 +1494,7 @@
           <a:bodyPr wrap="square" rtlCol="0" anchor="t"/>
           <a:lstStyle/>
           <a:p>
-            <a:pPr indent="0" marL="0">
+            <a:pPr marL="0" indent="0">
               <a:buNone/>
             </a:pPr>
             <a:r>
@@ -1730,7 +1511,7 @@
             <a:endParaRPr lang="en-US" sz="900" dirty="0"/>
           </a:p>
           <a:p>
-            <a:pPr indent="0" marL="0">
+            <a:pPr marL="0" indent="0">
               <a:buNone/>
             </a:pPr>
             <a:r>
@@ -1747,13 +1528,13 @@
             <a:endParaRPr lang="en-US" sz="900" dirty="0"/>
           </a:p>
           <a:p>
-            <a:pPr indent="0" marL="0">
+            <a:pPr marL="0" indent="0">
               <a:buNone/>
             </a:pPr>
             <a:endParaRPr lang="en-US" sz="900" dirty="0"/>
           </a:p>
           <a:p>
-            <a:pPr indent="0" marL="0">
+            <a:pPr marL="0" indent="0">
               <a:buNone/>
             </a:pPr>
             <a:r>
@@ -1770,7 +1551,7 @@
             <a:endParaRPr lang="en-US" sz="900" dirty="0"/>
           </a:p>
           <a:p>
-            <a:pPr indent="0" marL="0">
+            <a:pPr marL="0" indent="0">
               <a:buNone/>
             </a:pPr>
             <a:r>
@@ -1787,7 +1568,7 @@
             <a:endParaRPr lang="en-US" sz="900" dirty="0"/>
           </a:p>
           <a:p>
-            <a:pPr indent="0" marL="0">
+            <a:pPr marL="0" indent="0">
               <a:buNone/>
             </a:pPr>
             <a:r>
@@ -1804,7 +1585,7 @@
             <a:endParaRPr lang="en-US" sz="900" dirty="0"/>
           </a:p>
           <a:p>
-            <a:pPr indent="0" marL="0">
+            <a:pPr marL="0" indent="0">
               <a:buNone/>
             </a:pPr>
             <a:r>
@@ -1821,7 +1602,7 @@
             <a:endParaRPr lang="en-US" sz="900" dirty="0"/>
           </a:p>
           <a:p>
-            <a:pPr indent="0" marL="0">
+            <a:pPr marL="0" indent="0">
               <a:buNone/>
             </a:pPr>
             <a:r>
@@ -1838,7 +1619,7 @@
             <a:endParaRPr lang="en-US" sz="900" dirty="0"/>
           </a:p>
           <a:p>
-            <a:pPr indent="0" marL="0">
+            <a:pPr marL="0" indent="0">
               <a:buNone/>
             </a:pPr>
             <a:r>
@@ -1855,13 +1636,13 @@
             <a:endParaRPr lang="en-US" sz="900" dirty="0"/>
           </a:p>
           <a:p>
-            <a:pPr indent="0" marL="0">
+            <a:pPr marL="0" indent="0">
               <a:buNone/>
             </a:pPr>
             <a:endParaRPr lang="en-US" sz="900" dirty="0"/>
           </a:p>
           <a:p>
-            <a:pPr indent="0" marL="0">
+            <a:pPr marL="0" indent="0">
               <a:buNone/>
             </a:pPr>
             <a:r>
@@ -1878,7 +1659,7 @@
             <a:endParaRPr lang="en-US" sz="900" dirty="0"/>
           </a:p>
           <a:p>
-            <a:pPr indent="0" marL="0">
+            <a:pPr marL="0" indent="0">
               <a:buNone/>
             </a:pPr>
             <a:r>
@@ -1895,7 +1676,7 @@
             <a:endParaRPr lang="en-US" sz="900" dirty="0"/>
           </a:p>
           <a:p>
-            <a:pPr indent="0" marL="0">
+            <a:pPr marL="0" indent="0">
               <a:buNone/>
             </a:pPr>
             <a:r>
@@ -1912,7 +1693,7 @@
             <a:endParaRPr lang="en-US" sz="900" dirty="0"/>
           </a:p>
           <a:p>
-            <a:pPr indent="0" marL="0">
+            <a:pPr marL="0" indent="0">
               <a:buNone/>
             </a:pPr>
             <a:r>
@@ -1929,7 +1710,7 @@
             <a:endParaRPr lang="en-US" sz="900" dirty="0"/>
           </a:p>
           <a:p>
-            <a:pPr indent="0" marL="0">
+            <a:pPr marL="0" indent="0">
               <a:buNone/>
             </a:pPr>
             <a:r>
@@ -1946,13 +1727,13 @@
             <a:endParaRPr lang="en-US" sz="900" dirty="0"/>
           </a:p>
           <a:p>
-            <a:pPr indent="0" marL="0">
+            <a:pPr marL="0" indent="0">
               <a:buNone/>
             </a:pPr>
             <a:endParaRPr lang="en-US" sz="900" dirty="0"/>
           </a:p>
           <a:p>
-            <a:pPr indent="0" marL="0">
+            <a:pPr marL="0" indent="0">
               <a:buNone/>
             </a:pPr>
             <a:r>
@@ -1969,7 +1750,7 @@
             <a:endParaRPr lang="en-US" sz="900" dirty="0"/>
           </a:p>
           <a:p>
-            <a:pPr indent="0" marL="0">
+            <a:pPr marL="0" indent="0">
               <a:buNone/>
             </a:pPr>
             <a:r>
@@ -1986,7 +1767,7 @@
             <a:endParaRPr lang="en-US" sz="900" dirty="0"/>
           </a:p>
           <a:p>
-            <a:pPr indent="0" marL="0">
+            <a:pPr marL="0" indent="0">
               <a:buNone/>
             </a:pPr>
             <a:r>
@@ -2003,7 +1784,7 @@
             <a:endParaRPr lang="en-US" sz="900" dirty="0"/>
           </a:p>
           <a:p>
-            <a:pPr indent="0" marL="0">
+            <a:pPr marL="0" indent="0">
               <a:buNone/>
             </a:pPr>
             <a:r>
@@ -2020,7 +1801,7 @@
             <a:endParaRPr lang="en-US" sz="900" dirty="0"/>
           </a:p>
           <a:p>
-            <a:pPr indent="0" marL="0">
+            <a:pPr marL="0" indent="0">
               <a:buNone/>
             </a:pPr>
             <a:r>
@@ -2062,6 +1843,13 @@
             <a:prstDash val="solid"/>
           </a:ln>
         </p:spPr>
+        <p:txBody>
+          <a:bodyPr/>
+          <a:lstStyle/>
+          <a:p>
+            <a:endParaRPr/>
+          </a:p>
+        </p:txBody>
       </p:sp>
       <p:sp>
         <p:nvSpPr>
@@ -2084,7 +1872,7 @@
           <a:bodyPr wrap="square" rtlCol="0" anchor="t"/>
           <a:lstStyle/>
           <a:p>
-            <a:pPr indent="0" marL="0">
+            <a:pPr marL="0" indent="0">
               <a:buNone/>
             </a:pPr>
             <a:r>
@@ -2123,6 +1911,13 @@
             <a:prstDash val="solid"/>
           </a:ln>
         </p:spPr>
+        <p:txBody>
+          <a:bodyPr/>
+          <a:lstStyle/>
+          <a:p>
+            <a:endParaRPr/>
+          </a:p>
+        </p:txBody>
       </p:sp>
       <p:sp>
         <p:nvSpPr>
@@ -2145,7 +1940,7 @@
           <a:bodyPr wrap="square" rtlCol="0" anchor="t"/>
           <a:lstStyle/>
           <a:p>
-            <a:pPr indent="0" marL="0">
+            <a:pPr marL="0" indent="0">
               <a:buNone/>
             </a:pPr>
             <a:r>
@@ -2184,6 +1979,13 @@
             <a:prstDash val="solid"/>
           </a:ln>
         </p:spPr>
+        <p:txBody>
+          <a:bodyPr/>
+          <a:lstStyle/>
+          <a:p>
+            <a:endParaRPr/>
+          </a:p>
+        </p:txBody>
       </p:sp>
       <p:sp>
         <p:nvSpPr>
@@ -2206,7 +2008,7 @@
           <a:bodyPr wrap="square" rtlCol="0" anchor="t"/>
           <a:lstStyle/>
           <a:p>
-            <a:pPr indent="0" marL="0">
+            <a:pPr marL="0" indent="0">
               <a:buNone/>
             </a:pPr>
             <a:r>
@@ -2245,6 +2047,13 @@
             <a:prstDash val="solid"/>
           </a:ln>
         </p:spPr>
+        <p:txBody>
+          <a:bodyPr/>
+          <a:lstStyle/>
+          <a:p>
+            <a:endParaRPr/>
+          </a:p>
+        </p:txBody>
       </p:sp>
       <p:sp>
         <p:nvSpPr>
@@ -2267,7 +2076,7 @@
           <a:bodyPr wrap="square" rtlCol="0" anchor="t"/>
           <a:lstStyle/>
           <a:p>
-            <a:pPr indent="0" marL="0">
+            <a:pPr marL="0" indent="0">
               <a:buNone/>
             </a:pPr>
             <a:r>
@@ -2298,6 +2107,7 @@
         <a:solidFill>
           <a:srgbClr val="0D1117"/>
         </a:solidFill>
+        <a:effectLst/>
       </p:bgPr>
     </p:bg>
     <p:spTree>
@@ -2335,7 +2145,7 @@
           <a:bodyPr wrap="square" rtlCol="0" anchor="ctr"/>
           <a:lstStyle/>
           <a:p>
-            <a:pPr indent="0" marL="0">
+            <a:pPr marL="0" indent="0">
               <a:buNone/>
             </a:pPr>
             <a:r>
@@ -2372,6 +2182,13 @@
           </a:solidFill>
           <a:ln/>
         </p:spPr>
+        <p:txBody>
+          <a:bodyPr/>
+          <a:lstStyle/>
+          <a:p>
+            <a:endParaRPr/>
+          </a:p>
+        </p:txBody>
       </p:sp>
       <p:sp>
         <p:nvSpPr>
@@ -2394,7 +2211,7 @@
           <a:bodyPr wrap="square" rtlCol="0" anchor="ctr"/>
           <a:lstStyle/>
           <a:p>
-            <a:pPr indent="0" marL="0">
+            <a:pPr marL="0" indent="0">
               <a:buNone/>
             </a:pPr>
             <a:r>
@@ -2430,7 +2247,7 @@
           <a:bodyPr wrap="square" rtlCol="0" anchor="ctr"/>
           <a:lstStyle/>
           <a:p>
-            <a:pPr indent="0" marL="0">
+            <a:pPr marL="0" indent="0">
               <a:buNone/>
             </a:pPr>
             <a:r>
@@ -2466,7 +2283,7 @@
           <a:bodyPr wrap="square" rtlCol="0" anchor="ctr"/>
           <a:lstStyle/>
           <a:p>
-            <a:pPr indent="0" marL="0">
+            <a:pPr marL="0" indent="0">
               <a:buNone/>
             </a:pPr>
             <a:r>
@@ -2502,7 +2319,7 @@
           <a:bodyPr wrap="square" rtlCol="0" anchor="ctr"/>
           <a:lstStyle/>
           <a:p>
-            <a:pPr indent="0" marL="0">
+            <a:pPr marL="0" indent="0">
               <a:buNone/>
             </a:pPr>
             <a:r>
@@ -2538,7 +2355,7 @@
           <a:bodyPr wrap="square" rtlCol="0" anchor="ctr"/>
           <a:lstStyle/>
           <a:p>
-            <a:pPr indent="0" marL="0">
+            <a:pPr marL="0" indent="0">
               <a:buNone/>
             </a:pPr>
             <a:r>
@@ -2574,7 +2391,7 @@
           <a:bodyPr wrap="square" rtlCol="0" anchor="ctr"/>
           <a:lstStyle/>
           <a:p>
-            <a:pPr indent="0" marL="0">
+            <a:pPr marL="0" indent="0">
               <a:buNone/>
             </a:pPr>
             <a:r>
@@ -2610,7 +2427,7 @@
           <a:bodyPr wrap="square" rtlCol="0" anchor="ctr"/>
           <a:lstStyle/>
           <a:p>
-            <a:pPr indent="0" marL="0">
+            <a:pPr marL="0" indent="0">
               <a:buNone/>
             </a:pPr>
             <a:r>
@@ -2646,7 +2463,7 @@
           <a:bodyPr wrap="square" rtlCol="0" anchor="ctr"/>
           <a:lstStyle/>
           <a:p>
-            <a:pPr indent="0" marL="0">
+            <a:pPr marL="0" indent="0">
               <a:buNone/>
             </a:pPr>
             <a:r>
@@ -2682,7 +2499,7 @@
           <a:bodyPr wrap="square" rtlCol="0" anchor="ctr"/>
           <a:lstStyle/>
           <a:p>
-            <a:pPr indent="0" marL="0">
+            <a:pPr marL="0" indent="0">
               <a:buNone/>
             </a:pPr>
             <a:r>
@@ -2716,6 +2533,13 @@
           </a:solidFill>
           <a:ln/>
         </p:spPr>
+        <p:txBody>
+          <a:bodyPr/>
+          <a:lstStyle/>
+          <a:p>
+            <a:endParaRPr/>
+          </a:p>
+        </p:txBody>
       </p:sp>
       <p:sp>
         <p:nvSpPr>
@@ -2736,6 +2560,13 @@
           </a:solidFill>
           <a:ln/>
         </p:spPr>
+        <p:txBody>
+          <a:bodyPr/>
+          <a:lstStyle/>
+          <a:p>
+            <a:endParaRPr/>
+          </a:p>
+        </p:txBody>
       </p:sp>
       <p:sp>
         <p:nvSpPr>
@@ -2758,7 +2589,7 @@
           <a:bodyPr wrap="square" rtlCol="0" anchor="ctr"/>
           <a:lstStyle/>
           <a:p>
-            <a:pPr indent="0" marL="0">
+            <a:pPr marL="0" indent="0">
               <a:buNone/>
             </a:pPr>
             <a:r>
@@ -2797,6 +2628,13 @@
             <a:prstDash val="solid"/>
           </a:ln>
         </p:spPr>
+        <p:txBody>
+          <a:bodyPr/>
+          <a:lstStyle/>
+          <a:p>
+            <a:endParaRPr/>
+          </a:p>
+        </p:txBody>
       </p:sp>
       <p:sp>
         <p:nvSpPr>
@@ -2817,6 +2655,13 @@
           </a:solidFill>
           <a:ln/>
         </p:spPr>
+        <p:txBody>
+          <a:bodyPr/>
+          <a:lstStyle/>
+          <a:p>
+            <a:endParaRPr/>
+          </a:p>
+        </p:txBody>
       </p:sp>
       <p:sp>
         <p:nvSpPr>
@@ -2839,7 +2684,7 @@
           <a:bodyPr wrap="square" rtlCol="0" anchor="t"/>
           <a:lstStyle/>
           <a:p>
-            <a:pPr indent="0" marL="0">
+            <a:pPr marL="0" indent="0">
               <a:buNone/>
             </a:pPr>
             <a:r>
@@ -2856,7 +2701,7 @@
             <a:endParaRPr lang="en-US" sz="900" dirty="0"/>
           </a:p>
           <a:p>
-            <a:pPr indent="0" marL="0">
+            <a:pPr marL="0" indent="0">
               <a:buNone/>
             </a:pPr>
             <a:r>
@@ -2873,7 +2718,7 @@
             <a:endParaRPr lang="en-US" sz="900" dirty="0"/>
           </a:p>
           <a:p>
-            <a:pPr indent="0" marL="0">
+            <a:pPr marL="0" indent="0">
               <a:buNone/>
             </a:pPr>
             <a:r>
@@ -2890,7 +2735,7 @@
             <a:endParaRPr lang="en-US" sz="900" dirty="0"/>
           </a:p>
           <a:p>
-            <a:pPr indent="0" marL="0">
+            <a:pPr marL="0" indent="0">
               <a:buNone/>
             </a:pPr>
             <a:r>
@@ -2907,7 +2752,7 @@
             <a:endParaRPr lang="en-US" sz="900" dirty="0"/>
           </a:p>
           <a:p>
-            <a:pPr indent="0" marL="0">
+            <a:pPr marL="0" indent="0">
               <a:buNone/>
             </a:pPr>
             <a:r>
@@ -2946,7 +2791,7 @@
           <a:bodyPr wrap="square" rtlCol="0" anchor="ctr"/>
           <a:lstStyle/>
           <a:p>
-            <a:pPr indent="0" marL="0">
+            <a:pPr marL="0" indent="0">
               <a:buNone/>
             </a:pPr>
             <a:r>
@@ -2982,7 +2827,7 @@
           <a:bodyPr wrap="square" rtlCol="0" anchor="ctr"/>
           <a:lstStyle/>
           <a:p>
-            <a:pPr indent="0" marL="0">
+            <a:pPr marL="0" indent="0">
               <a:buNone/>
             </a:pPr>
             <a:r>
@@ -3018,7 +2863,7 @@
           <a:bodyPr wrap="square" rtlCol="0" anchor="ctr"/>
           <a:lstStyle/>
           <a:p>
-            <a:pPr indent="0" marL="0">
+            <a:pPr marL="0" indent="0">
               <a:buNone/>
             </a:pPr>
             <a:r>
@@ -3054,7 +2899,7 @@
           <a:bodyPr wrap="square" rtlCol="0" anchor="ctr"/>
           <a:lstStyle/>
           <a:p>
-            <a:pPr indent="0" marL="0">
+            <a:pPr marL="0" indent="0">
               <a:buNone/>
             </a:pPr>
             <a:r>
@@ -3085,6 +2930,7 @@
         <a:solidFill>
           <a:srgbClr val="0D1117"/>
         </a:solidFill>
+        <a:effectLst/>
       </p:bgPr>
     </p:bg>
     <p:spTree>
@@ -3122,7 +2968,7 @@
           <a:bodyPr wrap="square" rtlCol="0" anchor="ctr"/>
           <a:lstStyle/>
           <a:p>
-            <a:pPr indent="0" marL="0">
+            <a:pPr marL="0" indent="0">
               <a:buNone/>
             </a:pPr>
             <a:r>
@@ -3161,7 +3007,7 @@
           <a:bodyPr wrap="square" rtlCol="0" anchor="ctr"/>
           <a:lstStyle/>
           <a:p>
-            <a:pPr indent="0" marL="0">
+            <a:pPr marL="0" indent="0">
               <a:buNone/>
             </a:pPr>
             <a:r>
@@ -3200,6 +3046,13 @@
             <a:prstDash val="solid"/>
           </a:ln>
         </p:spPr>
+        <p:txBody>
+          <a:bodyPr/>
+          <a:lstStyle/>
+          <a:p>
+            <a:endParaRPr/>
+          </a:p>
+        </p:txBody>
       </p:sp>
       <p:sp>
         <p:nvSpPr>
@@ -3220,6 +3073,13 @@
           </a:solidFill>
           <a:ln/>
         </p:spPr>
+        <p:txBody>
+          <a:bodyPr/>
+          <a:lstStyle/>
+          <a:p>
+            <a:endParaRPr/>
+          </a:p>
+        </p:txBody>
       </p:sp>
       <p:sp>
         <p:nvSpPr>
@@ -3242,7 +3102,7 @@
           <a:bodyPr wrap="square" rtlCol="0" anchor="t"/>
           <a:lstStyle/>
           <a:p>
-            <a:pPr indent="0" marL="0">
+            <a:pPr marL="0" indent="0">
               <a:buNone/>
             </a:pPr>
             <a:r>
@@ -3259,7 +3119,7 @@
             <a:endParaRPr lang="en-US" sz="900" dirty="0"/>
           </a:p>
           <a:p>
-            <a:pPr indent="0" marL="0">
+            <a:pPr marL="0" indent="0">
               <a:buNone/>
             </a:pPr>
             <a:r>
@@ -3276,7 +3136,7 @@
             <a:endParaRPr lang="en-US" sz="900" dirty="0"/>
           </a:p>
           <a:p>
-            <a:pPr indent="0" marL="0">
+            <a:pPr marL="0" indent="0">
               <a:buNone/>
             </a:pPr>
             <a:r>
@@ -3293,7 +3153,7 @@
             <a:endParaRPr lang="en-US" sz="900" dirty="0"/>
           </a:p>
           <a:p>
-            <a:pPr indent="0" marL="0">
+            <a:pPr marL="0" indent="0">
               <a:buNone/>
             </a:pPr>
             <a:r>
@@ -3310,7 +3170,7 @@
             <a:endParaRPr lang="en-US" sz="900" dirty="0"/>
           </a:p>
           <a:p>
-            <a:pPr indent="0" marL="0">
+            <a:pPr marL="0" indent="0">
               <a:buNone/>
             </a:pPr>
             <a:r>
@@ -3327,7 +3187,7 @@
             <a:endParaRPr lang="en-US" sz="900" dirty="0"/>
           </a:p>
           <a:p>
-            <a:pPr indent="0" marL="0">
+            <a:pPr marL="0" indent="0">
               <a:buNone/>
             </a:pPr>
             <a:r>
@@ -3366,7 +3226,7 @@
           <a:bodyPr wrap="square" rtlCol="0" anchor="ctr"/>
           <a:lstStyle/>
           <a:p>
-            <a:pPr indent="0" marL="0">
+            <a:pPr marL="0" indent="0">
               <a:buNone/>
             </a:pPr>
             <a:r>
@@ -3405,6 +3265,13 @@
             <a:prstDash val="solid"/>
           </a:ln>
         </p:spPr>
+        <p:txBody>
+          <a:bodyPr/>
+          <a:lstStyle/>
+          <a:p>
+            <a:endParaRPr/>
+          </a:p>
+        </p:txBody>
       </p:sp>
       <p:sp>
         <p:nvSpPr>
@@ -3425,6 +3292,13 @@
           </a:solidFill>
           <a:ln/>
         </p:spPr>
+        <p:txBody>
+          <a:bodyPr/>
+          <a:lstStyle/>
+          <a:p>
+            <a:endParaRPr/>
+          </a:p>
+        </p:txBody>
       </p:sp>
       <p:sp>
         <p:nvSpPr>
@@ -3447,7 +3321,7 @@
           <a:bodyPr wrap="square" rtlCol="0" anchor="t"/>
           <a:lstStyle/>
           <a:p>
-            <a:pPr indent="0" marL="0">
+            <a:pPr marL="0" indent="0">
               <a:buNone/>
             </a:pPr>
             <a:r>
@@ -3464,7 +3338,7 @@
             <a:endParaRPr lang="en-US" sz="900" dirty="0"/>
           </a:p>
           <a:p>
-            <a:pPr indent="0" marL="0">
+            <a:pPr marL="0" indent="0">
               <a:buNone/>
             </a:pPr>
             <a:r>
@@ -3481,7 +3355,7 @@
             <a:endParaRPr lang="en-US" sz="900" dirty="0"/>
           </a:p>
           <a:p>
-            <a:pPr indent="0" marL="0">
+            <a:pPr marL="0" indent="0">
               <a:buNone/>
             </a:pPr>
             <a:r>
@@ -3498,7 +3372,7 @@
             <a:endParaRPr lang="en-US" sz="900" dirty="0"/>
           </a:p>
           <a:p>
-            <a:pPr indent="0" marL="0">
+            <a:pPr marL="0" indent="0">
               <a:buNone/>
             </a:pPr>
             <a:r>
@@ -3515,7 +3389,7 @@
             <a:endParaRPr lang="en-US" sz="900" dirty="0"/>
           </a:p>
           <a:p>
-            <a:pPr indent="0" marL="0">
+            <a:pPr marL="0" indent="0">
               <a:buNone/>
             </a:pPr>
             <a:r>
@@ -3532,7 +3406,7 @@
             <a:endParaRPr lang="en-US" sz="900" dirty="0"/>
           </a:p>
           <a:p>
-            <a:pPr indent="0" marL="0">
+            <a:pPr marL="0" indent="0">
               <a:buNone/>
             </a:pPr>
             <a:r>
@@ -3571,7 +3445,7 @@
           <a:bodyPr wrap="square" rtlCol="0" anchor="ctr"/>
           <a:lstStyle/>
           <a:p>
-            <a:pPr indent="0" marL="0">
+            <a:pPr marL="0" indent="0">
               <a:buNone/>
             </a:pPr>
             <a:r>
@@ -3610,6 +3484,13 @@
             <a:prstDash val="solid"/>
           </a:ln>
         </p:spPr>
+        <p:txBody>
+          <a:bodyPr/>
+          <a:lstStyle/>
+          <a:p>
+            <a:endParaRPr/>
+          </a:p>
+        </p:txBody>
       </p:sp>
       <p:sp>
         <p:nvSpPr>
@@ -3630,6 +3511,13 @@
           </a:solidFill>
           <a:ln/>
         </p:spPr>
+        <p:txBody>
+          <a:bodyPr/>
+          <a:lstStyle/>
+          <a:p>
+            <a:endParaRPr/>
+          </a:p>
+        </p:txBody>
       </p:sp>
       <p:sp>
         <p:nvSpPr>
@@ -3652,7 +3540,7 @@
           <a:bodyPr wrap="square" rtlCol="0" anchor="t"/>
           <a:lstStyle/>
           <a:p>
-            <a:pPr indent="0" marL="0">
+            <a:pPr marL="0" indent="0">
               <a:buNone/>
             </a:pPr>
             <a:r>
@@ -3669,7 +3557,7 @@
             <a:endParaRPr lang="en-US" sz="900" dirty="0"/>
           </a:p>
           <a:p>
-            <a:pPr indent="0" marL="0">
+            <a:pPr marL="0" indent="0">
               <a:buNone/>
             </a:pPr>
             <a:r>
@@ -3686,7 +3574,7 @@
             <a:endParaRPr lang="en-US" sz="900" dirty="0"/>
           </a:p>
           <a:p>
-            <a:pPr indent="0" marL="0">
+            <a:pPr marL="0" indent="0">
               <a:buNone/>
             </a:pPr>
             <a:r>
@@ -3703,7 +3591,7 @@
             <a:endParaRPr lang="en-US" sz="900" dirty="0"/>
           </a:p>
           <a:p>
-            <a:pPr indent="0" marL="0">
+            <a:pPr marL="0" indent="0">
               <a:buNone/>
             </a:pPr>
             <a:r>
@@ -3720,7 +3608,7 @@
             <a:endParaRPr lang="en-US" sz="900" dirty="0"/>
           </a:p>
           <a:p>
-            <a:pPr indent="0" marL="0">
+            <a:pPr marL="0" indent="0">
               <a:buNone/>
             </a:pPr>
             <a:r>
@@ -3737,7 +3625,7 @@
             <a:endParaRPr lang="en-US" sz="900" dirty="0"/>
           </a:p>
           <a:p>
-            <a:pPr indent="0" marL="0">
+            <a:pPr marL="0" indent="0">
               <a:buNone/>
             </a:pPr>
             <a:r>
@@ -3754,7 +3642,7 @@
             <a:endParaRPr lang="en-US" sz="900" dirty="0"/>
           </a:p>
           <a:p>
-            <a:pPr indent="0" marL="0">
+            <a:pPr marL="0" indent="0">
               <a:buNone/>
             </a:pPr>
             <a:r>
@@ -3771,7 +3659,7 @@
             <a:endParaRPr lang="en-US" sz="900" dirty="0"/>
           </a:p>
           <a:p>
-            <a:pPr indent="0" marL="0">
+            <a:pPr marL="0" indent="0">
               <a:buNone/>
             </a:pPr>
             <a:r>
@@ -3810,7 +3698,7 @@
           <a:bodyPr wrap="square" rtlCol="0" anchor="ctr"/>
           <a:lstStyle/>
           <a:p>
-            <a:pPr indent="0" marL="0">
+            <a:pPr marL="0" indent="0">
               <a:buNone/>
             </a:pPr>
             <a:r>
@@ -3849,6 +3737,13 @@
             <a:prstDash val="solid"/>
           </a:ln>
         </p:spPr>
+        <p:txBody>
+          <a:bodyPr/>
+          <a:lstStyle/>
+          <a:p>
+            <a:endParaRPr/>
+          </a:p>
+        </p:txBody>
       </p:sp>
       <p:sp>
         <p:nvSpPr>
@@ -3869,6 +3764,13 @@
           </a:solidFill>
           <a:ln/>
         </p:spPr>
+        <p:txBody>
+          <a:bodyPr/>
+          <a:lstStyle/>
+          <a:p>
+            <a:endParaRPr/>
+          </a:p>
+        </p:txBody>
       </p:sp>
       <p:sp>
         <p:nvSpPr>
@@ -3891,7 +3793,7 @@
           <a:bodyPr wrap="square" rtlCol="0" anchor="t"/>
           <a:lstStyle/>
           <a:p>
-            <a:pPr indent="0" marL="0">
+            <a:pPr marL="0" indent="0">
               <a:buNone/>
             </a:pPr>
             <a:r>
@@ -3908,7 +3810,7 @@
             <a:endParaRPr lang="en-US" sz="900" dirty="0"/>
           </a:p>
           <a:p>
-            <a:pPr indent="0" marL="0">
+            <a:pPr marL="0" indent="0">
               <a:buNone/>
             </a:pPr>
             <a:r>
@@ -3925,7 +3827,7 @@
             <a:endParaRPr lang="en-US" sz="900" dirty="0"/>
           </a:p>
           <a:p>
-            <a:pPr indent="0" marL="0">
+            <a:pPr marL="0" indent="0">
               <a:buNone/>
             </a:pPr>
             <a:r>
@@ -3959,6 +3861,7 @@
         <a:solidFill>
           <a:srgbClr val="0D1117"/>
         </a:solidFill>
+        <a:effectLst/>
       </p:bgPr>
     </p:bg>
     <p:spTree>
@@ -3996,7 +3899,7 @@
           <a:bodyPr wrap="square" rtlCol="0" anchor="ctr"/>
           <a:lstStyle/>
           <a:p>
-            <a:pPr indent="0" marL="0">
+            <a:pPr marL="0" indent="0">
               <a:buNone/>
             </a:pPr>
             <a:r>
@@ -4035,7 +3938,7 @@
           <a:bodyPr wrap="square" rtlCol="0" anchor="ctr"/>
           <a:lstStyle/>
           <a:p>
-            <a:pPr indent="0" marL="0">
+            <a:pPr marL="0" indent="0">
               <a:buNone/>
             </a:pPr>
             <a:r>
@@ -4069,6 +3972,13 @@
           </a:solidFill>
           <a:ln/>
         </p:spPr>
+        <p:txBody>
+          <a:bodyPr/>
+          <a:lstStyle/>
+          <a:p>
+            <a:endParaRPr/>
+          </a:p>
+        </p:txBody>
       </p:sp>
       <p:sp>
         <p:nvSpPr>
@@ -4089,6 +3999,13 @@
           </a:solidFill>
           <a:ln/>
         </p:spPr>
+        <p:txBody>
+          <a:bodyPr/>
+          <a:lstStyle/>
+          <a:p>
+            <a:endParaRPr/>
+          </a:p>
+        </p:txBody>
       </p:sp>
       <p:sp>
         <p:nvSpPr>
@@ -4111,7 +4028,7 @@
           <a:bodyPr wrap="square" rtlCol="0" anchor="ctr"/>
           <a:lstStyle/>
           <a:p>
-            <a:pPr indent="0" marL="0">
+            <a:pPr marL="0" indent="0">
               <a:buNone/>
             </a:pPr>
             <a:r>
@@ -4147,7 +4064,7 @@
           <a:bodyPr wrap="square" rtlCol="0" anchor="ctr"/>
           <a:lstStyle/>
           <a:p>
-            <a:pPr indent="0" marL="0">
+            <a:pPr marL="0" indent="0">
               <a:buNone/>
             </a:pPr>
             <a:r>
@@ -4181,6 +4098,13 @@
           </a:solidFill>
           <a:ln/>
         </p:spPr>
+        <p:txBody>
+          <a:bodyPr/>
+          <a:lstStyle/>
+          <a:p>
+            <a:endParaRPr/>
+          </a:p>
+        </p:txBody>
       </p:sp>
       <p:sp>
         <p:nvSpPr>
@@ -4201,6 +4125,13 @@
           </a:solidFill>
           <a:ln/>
         </p:spPr>
+        <p:txBody>
+          <a:bodyPr/>
+          <a:lstStyle/>
+          <a:p>
+            <a:endParaRPr/>
+          </a:p>
+        </p:txBody>
       </p:sp>
       <p:sp>
         <p:nvSpPr>
@@ -4223,7 +4154,7 @@
           <a:bodyPr wrap="square" rtlCol="0" anchor="ctr"/>
           <a:lstStyle/>
           <a:p>
-            <a:pPr indent="0" marL="0">
+            <a:pPr marL="0" indent="0">
               <a:buNone/>
             </a:pPr>
             <a:r>
@@ -4259,7 +4190,7 @@
           <a:bodyPr wrap="square" rtlCol="0" anchor="ctr"/>
           <a:lstStyle/>
           <a:p>
-            <a:pPr indent="0" marL="0">
+            <a:pPr marL="0" indent="0">
               <a:buNone/>
             </a:pPr>
             <a:r>
@@ -4295,7 +4226,7 @@
           <a:bodyPr wrap="square" rtlCol="0" anchor="ctr"/>
           <a:lstStyle/>
           <a:p>
-            <a:pPr indent="0" marL="0">
+            <a:pPr marL="0" indent="0">
               <a:buNone/>
             </a:pPr>
             <a:r>
@@ -4329,6 +4260,13 @@
           </a:solidFill>
           <a:ln/>
         </p:spPr>
+        <p:txBody>
+          <a:bodyPr/>
+          <a:lstStyle/>
+          <a:p>
+            <a:endParaRPr/>
+          </a:p>
+        </p:txBody>
       </p:sp>
       <p:sp>
         <p:nvSpPr>
@@ -4349,6 +4287,13 @@
           </a:solidFill>
           <a:ln/>
         </p:spPr>
+        <p:txBody>
+          <a:bodyPr/>
+          <a:lstStyle/>
+          <a:p>
+            <a:endParaRPr/>
+          </a:p>
+        </p:txBody>
       </p:sp>
       <p:sp>
         <p:nvSpPr>
@@ -4371,7 +4316,7 @@
           <a:bodyPr wrap="square" rtlCol="0" anchor="ctr"/>
           <a:lstStyle/>
           <a:p>
-            <a:pPr indent="0" marL="0">
+            <a:pPr marL="0" indent="0">
               <a:buNone/>
             </a:pPr>
             <a:r>
@@ -4407,7 +4352,7 @@
           <a:bodyPr wrap="square" rtlCol="0" anchor="ctr"/>
           <a:lstStyle/>
           <a:p>
-            <a:pPr indent="0" marL="0">
+            <a:pPr marL="0" indent="0">
               <a:buNone/>
             </a:pPr>
             <a:r>
@@ -4441,6 +4386,13 @@
           </a:solidFill>
           <a:ln/>
         </p:spPr>
+        <p:txBody>
+          <a:bodyPr/>
+          <a:lstStyle/>
+          <a:p>
+            <a:endParaRPr/>
+          </a:p>
+        </p:txBody>
       </p:sp>
       <p:sp>
         <p:nvSpPr>
@@ -4463,7 +4415,7 @@
           <a:bodyPr wrap="square" rtlCol="0" anchor="ctr"/>
           <a:lstStyle/>
           <a:p>
-            <a:pPr indent="0" marL="0">
+            <a:pPr marL="0" indent="0">
               <a:buNone/>
             </a:pPr>
             <a:r>
@@ -4480,7 +4432,7 @@
             <a:endParaRPr lang="en-US" sz="800" dirty="0"/>
           </a:p>
           <a:p>
-            <a:pPr indent="0" marL="0">
+            <a:pPr marL="0" indent="0">
               <a:buNone/>
             </a:pPr>
             <a:r>
@@ -4517,6 +4469,13 @@
           </a:solidFill>
           <a:ln/>
         </p:spPr>
+        <p:txBody>
+          <a:bodyPr/>
+          <a:lstStyle/>
+          <a:p>
+            <a:endParaRPr/>
+          </a:p>
+        </p:txBody>
       </p:sp>
       <p:sp>
         <p:nvSpPr>
@@ -4537,6 +4496,13 @@
           </a:solidFill>
           <a:ln/>
         </p:spPr>
+        <p:txBody>
+          <a:bodyPr/>
+          <a:lstStyle/>
+          <a:p>
+            <a:endParaRPr/>
+          </a:p>
+        </p:txBody>
       </p:sp>
       <p:sp>
         <p:nvSpPr>
@@ -4559,7 +4525,7 @@
           <a:bodyPr wrap="square" rtlCol="0" anchor="ctr"/>
           <a:lstStyle/>
           <a:p>
-            <a:pPr indent="0" marL="0">
+            <a:pPr marL="0" indent="0">
               <a:buNone/>
             </a:pPr>
             <a:r>
@@ -4595,7 +4561,7 @@
           <a:bodyPr wrap="square" rtlCol="0" anchor="ctr"/>
           <a:lstStyle/>
           <a:p>
-            <a:pPr indent="0" marL="0">
+            <a:pPr marL="0" indent="0">
               <a:buNone/>
             </a:pPr>
             <a:r>
@@ -4626,6 +4592,7 @@
         <a:solidFill>
           <a:srgbClr val="0D1117"/>
         </a:solidFill>
+        <a:effectLst/>
       </p:bgPr>
     </p:bg>
     <p:spTree>
@@ -4663,7 +4630,7 @@
           <a:bodyPr wrap="square" rtlCol="0" anchor="ctr"/>
           <a:lstStyle/>
           <a:p>
-            <a:pPr indent="0" marL="0">
+            <a:pPr marL="0" indent="0">
               <a:buNone/>
             </a:pPr>
             <a:r>
@@ -4700,6 +4667,13 @@
           </a:solidFill>
           <a:ln/>
         </p:spPr>
+        <p:txBody>
+          <a:bodyPr/>
+          <a:lstStyle/>
+          <a:p>
+            <a:endParaRPr/>
+          </a:p>
+        </p:txBody>
       </p:sp>
       <p:sp>
         <p:nvSpPr>
@@ -4720,6 +4694,13 @@
           </a:solidFill>
           <a:ln/>
         </p:spPr>
+        <p:txBody>
+          <a:bodyPr/>
+          <a:lstStyle/>
+          <a:p>
+            <a:endParaRPr/>
+          </a:p>
+        </p:txBody>
       </p:sp>
       <p:sp>
         <p:nvSpPr>
@@ -4742,7 +4723,7 @@
           <a:bodyPr wrap="square" rtlCol="0" anchor="ctr"/>
           <a:lstStyle/>
           <a:p>
-            <a:pPr indent="0" marL="0">
+            <a:pPr marL="0" indent="0">
               <a:buNone/>
             </a:pPr>
             <a:r>
@@ -4778,7 +4759,7 @@
           <a:bodyPr wrap="square" rtlCol="0" anchor="ctr"/>
           <a:lstStyle/>
           <a:p>
-            <a:pPr indent="0" marL="0">
+            <a:pPr marL="0" indent="0">
               <a:buNone/>
             </a:pPr>
             <a:r>
@@ -4817,7 +4798,7 @@
           <a:bodyPr wrap="square" rtlCol="0" anchor="ctr"/>
           <a:lstStyle/>
           <a:p>
-            <a:pPr indent="0" marL="0">
+            <a:pPr marL="0" indent="0">
               <a:buNone/>
             </a:pPr>
             <a:r>
@@ -4854,6 +4835,13 @@
           </a:solidFill>
           <a:ln/>
         </p:spPr>
+        <p:txBody>
+          <a:bodyPr/>
+          <a:lstStyle/>
+          <a:p>
+            <a:endParaRPr/>
+          </a:p>
+        </p:txBody>
       </p:sp>
       <p:sp>
         <p:nvSpPr>
@@ -4874,6 +4862,13 @@
           </a:solidFill>
           <a:ln/>
         </p:spPr>
+        <p:txBody>
+          <a:bodyPr/>
+          <a:lstStyle/>
+          <a:p>
+            <a:endParaRPr/>
+          </a:p>
+        </p:txBody>
       </p:sp>
       <p:sp>
         <p:nvSpPr>
@@ -4896,7 +4891,7 @@
           <a:bodyPr wrap="square" rtlCol="0" anchor="ctr"/>
           <a:lstStyle/>
           <a:p>
-            <a:pPr indent="0" marL="0">
+            <a:pPr marL="0" indent="0">
               <a:buNone/>
             </a:pPr>
             <a:r>
@@ -4932,7 +4927,7 @@
           <a:bodyPr wrap="square" rtlCol="0" anchor="ctr"/>
           <a:lstStyle/>
           <a:p>
-            <a:pPr indent="0" marL="0">
+            <a:pPr marL="0" indent="0">
               <a:buNone/>
             </a:pPr>
             <a:r>
@@ -4971,7 +4966,7 @@
           <a:bodyPr wrap="square" rtlCol="0" anchor="ctr"/>
           <a:lstStyle/>
           <a:p>
-            <a:pPr indent="0" marL="0">
+            <a:pPr marL="0" indent="0">
               <a:buNone/>
             </a:pPr>
             <a:r>
@@ -5008,6 +5003,13 @@
           </a:solidFill>
           <a:ln/>
         </p:spPr>
+        <p:txBody>
+          <a:bodyPr/>
+          <a:lstStyle/>
+          <a:p>
+            <a:endParaRPr/>
+          </a:p>
+        </p:txBody>
       </p:sp>
       <p:sp>
         <p:nvSpPr>
@@ -5028,6 +5030,13 @@
           </a:solidFill>
           <a:ln/>
         </p:spPr>
+        <p:txBody>
+          <a:bodyPr/>
+          <a:lstStyle/>
+          <a:p>
+            <a:endParaRPr/>
+          </a:p>
+        </p:txBody>
       </p:sp>
       <p:sp>
         <p:nvSpPr>
@@ -5050,7 +5059,7 @@
           <a:bodyPr wrap="square" rtlCol="0" anchor="ctr"/>
           <a:lstStyle/>
           <a:p>
-            <a:pPr indent="0" marL="0">
+            <a:pPr marL="0" indent="0">
               <a:buNone/>
             </a:pPr>
             <a:r>
@@ -5086,7 +5095,7 @@
           <a:bodyPr wrap="square" rtlCol="0" anchor="ctr"/>
           <a:lstStyle/>
           <a:p>
-            <a:pPr indent="0" marL="0">
+            <a:pPr marL="0" indent="0">
               <a:buNone/>
             </a:pPr>
             <a:r>
@@ -5125,7 +5134,7 @@
           <a:bodyPr wrap="square" rtlCol="0" anchor="ctr"/>
           <a:lstStyle/>
           <a:p>
-            <a:pPr indent="0" marL="0">
+            <a:pPr marL="0" indent="0">
               <a:buNone/>
             </a:pPr>
             <a:r>
@@ -5162,6 +5171,13 @@
           </a:solidFill>
           <a:ln/>
         </p:spPr>
+        <p:txBody>
+          <a:bodyPr/>
+          <a:lstStyle/>
+          <a:p>
+            <a:endParaRPr/>
+          </a:p>
+        </p:txBody>
       </p:sp>
       <p:sp>
         <p:nvSpPr>
@@ -5182,6 +5198,13 @@
           </a:solidFill>
           <a:ln/>
         </p:spPr>
+        <p:txBody>
+          <a:bodyPr/>
+          <a:lstStyle/>
+          <a:p>
+            <a:endParaRPr/>
+          </a:p>
+        </p:txBody>
       </p:sp>
       <p:sp>
         <p:nvSpPr>
@@ -5204,7 +5227,7 @@
           <a:bodyPr wrap="square" rtlCol="0" anchor="ctr"/>
           <a:lstStyle/>
           <a:p>
-            <a:pPr indent="0" marL="0">
+            <a:pPr marL="0" indent="0">
               <a:buNone/>
             </a:pPr>
             <a:r>
@@ -5240,7 +5263,7 @@
           <a:bodyPr wrap="square" rtlCol="0" anchor="ctr"/>
           <a:lstStyle/>
           <a:p>
-            <a:pPr indent="0" marL="0">
+            <a:pPr marL="0" indent="0">
               <a:buNone/>
             </a:pPr>
             <a:r>
@@ -5279,7 +5302,7 @@
           <a:bodyPr wrap="square" rtlCol="0" anchor="ctr"/>
           <a:lstStyle/>
           <a:p>
-            <a:pPr indent="0" marL="0">
+            <a:pPr marL="0" indent="0">
               <a:buNone/>
             </a:pPr>
             <a:r>
@@ -5316,6 +5339,13 @@
           </a:solidFill>
           <a:ln/>
         </p:spPr>
+        <p:txBody>
+          <a:bodyPr/>
+          <a:lstStyle/>
+          <a:p>
+            <a:endParaRPr/>
+          </a:p>
+        </p:txBody>
       </p:sp>
       <p:sp>
         <p:nvSpPr>
@@ -5336,6 +5366,13 @@
           </a:solidFill>
           <a:ln/>
         </p:spPr>
+        <p:txBody>
+          <a:bodyPr/>
+          <a:lstStyle/>
+          <a:p>
+            <a:endParaRPr/>
+          </a:p>
+        </p:txBody>
       </p:sp>
       <p:sp>
         <p:nvSpPr>
@@ -5358,7 +5395,7 @@
           <a:bodyPr wrap="square" rtlCol="0" anchor="ctr"/>
           <a:lstStyle/>
           <a:p>
-            <a:pPr indent="0" marL="0">
+            <a:pPr marL="0" indent="0">
               <a:buNone/>
             </a:pPr>
             <a:r>
@@ -5394,7 +5431,7 @@
           <a:bodyPr wrap="square" rtlCol="0" anchor="ctr"/>
           <a:lstStyle/>
           <a:p>
-            <a:pPr indent="0" marL="0">
+            <a:pPr marL="0" indent="0">
               <a:buNone/>
             </a:pPr>
             <a:r>
@@ -5433,7 +5470,7 @@
           <a:bodyPr wrap="square" rtlCol="0" anchor="ctr"/>
           <a:lstStyle/>
           <a:p>
-            <a:pPr indent="0" marL="0">
+            <a:pPr marL="0" indent="0">
               <a:buNone/>
             </a:pPr>
             <a:r>
@@ -5470,6 +5507,13 @@
           </a:solidFill>
           <a:ln/>
         </p:spPr>
+        <p:txBody>
+          <a:bodyPr/>
+          <a:lstStyle/>
+          <a:p>
+            <a:endParaRPr/>
+          </a:p>
+        </p:txBody>
       </p:sp>
       <p:sp>
         <p:nvSpPr>
@@ -5490,6 +5534,13 @@
           </a:solidFill>
           <a:ln/>
         </p:spPr>
+        <p:txBody>
+          <a:bodyPr/>
+          <a:lstStyle/>
+          <a:p>
+            <a:endParaRPr/>
+          </a:p>
+        </p:txBody>
       </p:sp>
       <p:sp>
         <p:nvSpPr>
@@ -5512,7 +5563,7 @@
           <a:bodyPr wrap="square" rtlCol="0" anchor="ctr"/>
           <a:lstStyle/>
           <a:p>
-            <a:pPr indent="0" marL="0">
+            <a:pPr marL="0" indent="0">
               <a:buNone/>
             </a:pPr>
             <a:r>
@@ -5548,7 +5599,7 @@
           <a:bodyPr wrap="square" rtlCol="0" anchor="ctr"/>
           <a:lstStyle/>
           <a:p>
-            <a:pPr indent="0" marL="0">
+            <a:pPr marL="0" indent="0">
               <a:buNone/>
             </a:pPr>
             <a:r>
@@ -5587,7 +5638,7 @@
           <a:bodyPr wrap="square" rtlCol="0" anchor="ctr"/>
           <a:lstStyle/>
           <a:p>
-            <a:pPr indent="0" marL="0">
+            <a:pPr marL="0" indent="0">
               <a:buNone/>
             </a:pPr>
             <a:r>
@@ -5626,18 +5677,30 @@
           <a:bodyPr wrap="square" rtlCol="0" anchor="ctr"/>
           <a:lstStyle/>
           <a:p>
-            <a:pPr algn="ctr" indent="0" marL="0">
-              <a:buNone/>
-            </a:pPr>
-            <a:r>
-              <a:rPr lang="en-US" sz="1100" b="1" dirty="0">
-                <a:solidFill>
-                  <a:srgbClr val="2A9D8F"/>
-                </a:solidFill>
-              </a:rPr>
-              <a:t>Runtime cost: Zero — compiles to equivalent switch/jump table</a:t>
-            </a:r>
-            <a:endParaRPr lang="en-US" sz="1100" dirty="0"/>
+            <a:r>
+              <a:rPr dirty="0">
+                <a:solidFill>
+                  <a:schemeClr val="bg2"/>
+                </a:solidFill>
+              </a:rPr>
+              <a:t>Runtime cost: usually small; </a:t>
+            </a:r>
+            <a:r>
+              <a:rPr dirty="0" err="1">
+                <a:solidFill>
+                  <a:schemeClr val="bg2"/>
+                </a:solidFill>
+              </a:rPr>
+              <a:t>StrictTransitionPolicy</a:t>
+            </a:r>
+            <a:r>
+              <a:rPr dirty="0">
+                <a:solidFill>
+                  <a:schemeClr val="bg2"/>
+                </a:solidFill>
+              </a:rPr>
+              <a:t> adds an O(1) transition check. Benchmark hot paths.</a:t>
+            </a:r>
           </a:p>
         </p:txBody>
       </p:sp>
@@ -5657,6 +5720,7 @@
         <a:solidFill>
           <a:srgbClr val="0D1117"/>
         </a:solidFill>
+        <a:effectLst/>
       </p:bgPr>
     </p:bg>
     <p:spTree>
@@ -5694,7 +5758,7 @@
           <a:bodyPr wrap="square" rtlCol="0" anchor="ctr"/>
           <a:lstStyle/>
           <a:p>
-            <a:pPr indent="0" marL="0">
+            <a:pPr marL="0" indent="0">
               <a:buNone/>
             </a:pPr>
             <a:r>
@@ -5731,6 +5795,13 @@
           </a:solidFill>
           <a:ln/>
         </p:spPr>
+        <p:txBody>
+          <a:bodyPr/>
+          <a:lstStyle/>
+          <a:p>
+            <a:endParaRPr/>
+          </a:p>
+        </p:txBody>
       </p:sp>
       <p:sp>
         <p:nvSpPr>
@@ -5751,6 +5822,13 @@
           </a:solidFill>
           <a:ln/>
         </p:spPr>
+        <p:txBody>
+          <a:bodyPr/>
+          <a:lstStyle/>
+          <a:p>
+            <a:endParaRPr/>
+          </a:p>
+        </p:txBody>
       </p:sp>
       <p:sp>
         <p:nvSpPr>
@@ -5773,7 +5851,7 @@
           <a:bodyPr wrap="square" rtlCol="0" anchor="ctr"/>
           <a:lstStyle/>
           <a:p>
-            <a:pPr indent="0" marL="0">
+            <a:pPr marL="0" indent="0">
               <a:buNone/>
             </a:pPr>
             <a:r>
@@ -5809,7 +5887,7 @@
           <a:bodyPr wrap="square" rtlCol="0" anchor="ctr"/>
           <a:lstStyle/>
           <a:p>
-            <a:pPr indent="0" marL="0">
+            <a:pPr marL="0" indent="0">
               <a:buNone/>
             </a:pPr>
             <a:r>
@@ -5843,6 +5921,13 @@
           </a:solidFill>
           <a:ln/>
         </p:spPr>
+        <p:txBody>
+          <a:bodyPr/>
+          <a:lstStyle/>
+          <a:p>
+            <a:endParaRPr/>
+          </a:p>
+        </p:txBody>
       </p:sp>
       <p:sp>
         <p:nvSpPr>
@@ -5863,6 +5948,13 @@
           </a:solidFill>
           <a:ln/>
         </p:spPr>
+        <p:txBody>
+          <a:bodyPr/>
+          <a:lstStyle/>
+          <a:p>
+            <a:endParaRPr/>
+          </a:p>
+        </p:txBody>
       </p:sp>
       <p:sp>
         <p:nvSpPr>
@@ -5885,7 +5977,7 @@
           <a:bodyPr wrap="square" rtlCol="0" anchor="ctr"/>
           <a:lstStyle/>
           <a:p>
-            <a:pPr indent="0" marL="0">
+            <a:pPr marL="0" indent="0">
               <a:buNone/>
             </a:pPr>
             <a:r>
@@ -5921,18 +6013,9 @@
           <a:bodyPr wrap="square" rtlCol="0" anchor="ctr"/>
           <a:lstStyle/>
           <a:p>
-            <a:pPr indent="0" marL="0">
-              <a:buNone/>
-            </a:pPr>
-            <a:r>
-              <a:rPr lang="en-US" sz="1000" dirty="0">
-                <a:solidFill>
-                  <a:srgbClr val="E6EDF3"/>
-                </a:solidFill>
-              </a:rPr>
-              <a:t>StateMachine encodes transitions in the type system</a:t>
-            </a:r>
-            <a:endParaRPr lang="en-US" sz="1000" dirty="0"/>
+            <a:r>
+              <a:t>StateMachine encodes the state set + transition table in types; validates current→next at runtime (policy)</a:t>
+            </a:r>
           </a:p>
         </p:txBody>
       </p:sp>
@@ -5955,6 +6038,13 @@
           </a:solidFill>
           <a:ln/>
         </p:spPr>
+        <p:txBody>
+          <a:bodyPr/>
+          <a:lstStyle/>
+          <a:p>
+            <a:endParaRPr/>
+          </a:p>
+        </p:txBody>
       </p:sp>
       <p:sp>
         <p:nvSpPr>
@@ -5975,6 +6065,13 @@
           </a:solidFill>
           <a:ln/>
         </p:spPr>
+        <p:txBody>
+          <a:bodyPr/>
+          <a:lstStyle/>
+          <a:p>
+            <a:endParaRPr/>
+          </a:p>
+        </p:txBody>
       </p:sp>
       <p:sp>
         <p:nvSpPr>
@@ -5997,7 +6094,7 @@
           <a:bodyPr wrap="square" rtlCol="0" anchor="ctr"/>
           <a:lstStyle/>
           <a:p>
-            <a:pPr indent="0" marL="0">
+            <a:pPr marL="0" indent="0">
               <a:buNone/>
             </a:pPr>
             <a:r>
@@ -6033,7 +6130,7 @@
           <a:bodyPr wrap="square" rtlCol="0" anchor="ctr"/>
           <a:lstStyle/>
           <a:p>
-            <a:pPr indent="0" marL="0">
+            <a:pPr marL="0" indent="0">
               <a:buNone/>
             </a:pPr>
             <a:r>
@@ -6067,6 +6164,13 @@
           </a:solidFill>
           <a:ln/>
         </p:spPr>
+        <p:txBody>
+          <a:bodyPr/>
+          <a:lstStyle/>
+          <a:p>
+            <a:endParaRPr/>
+          </a:p>
+        </p:txBody>
       </p:sp>
       <p:sp>
         <p:nvSpPr>
@@ -6087,6 +6191,13 @@
           </a:solidFill>
           <a:ln/>
         </p:spPr>
+        <p:txBody>
+          <a:bodyPr/>
+          <a:lstStyle/>
+          <a:p>
+            <a:endParaRPr/>
+          </a:p>
+        </p:txBody>
       </p:sp>
       <p:sp>
         <p:nvSpPr>
@@ -6109,7 +6220,7 @@
           <a:bodyPr wrap="square" rtlCol="0" anchor="ctr"/>
           <a:lstStyle/>
           <a:p>
-            <a:pPr indent="0" marL="0">
+            <a:pPr marL="0" indent="0">
               <a:buNone/>
             </a:pPr>
             <a:r>
@@ -6145,7 +6256,7 @@
           <a:bodyPr wrap="square" rtlCol="0" anchor="ctr"/>
           <a:lstStyle/>
           <a:p>
-            <a:pPr indent="0" marL="0">
+            <a:pPr marL="0" indent="0">
               <a:buNone/>
             </a:pPr>
             <a:r>
@@ -6179,6 +6290,13 @@
           </a:solidFill>
           <a:ln/>
         </p:spPr>
+        <p:txBody>
+          <a:bodyPr/>
+          <a:lstStyle/>
+          <a:p>
+            <a:endParaRPr/>
+          </a:p>
+        </p:txBody>
       </p:sp>
       <p:sp>
         <p:nvSpPr>
@@ -6199,6 +6317,13 @@
           </a:solidFill>
           <a:ln/>
         </p:spPr>
+        <p:txBody>
+          <a:bodyPr/>
+          <a:lstStyle/>
+          <a:p>
+            <a:endParaRPr/>
+          </a:p>
+        </p:txBody>
       </p:sp>
       <p:sp>
         <p:nvSpPr>
@@ -6221,7 +6346,7 @@
           <a:bodyPr wrap="square" rtlCol="0" anchor="ctr"/>
           <a:lstStyle/>
           <a:p>
-            <a:pPr indent="0" marL="0">
+            <a:pPr marL="0" indent="0">
               <a:buNone/>
             </a:pPr>
             <a:r>
@@ -6257,7 +6382,7 @@
           <a:bodyPr wrap="square" rtlCol="0" anchor="ctr"/>
           <a:lstStyle/>
           <a:p>
-            <a:pPr indent="0" marL="0">
+            <a:pPr marL="0" indent="0">
               <a:buNone/>
             </a:pPr>
             <a:r>
@@ -6291,6 +6416,13 @@
           </a:solidFill>
           <a:ln/>
         </p:spPr>
+        <p:txBody>
+          <a:bodyPr/>
+          <a:lstStyle/>
+          <a:p>
+            <a:endParaRPr/>
+          </a:p>
+        </p:txBody>
       </p:sp>
       <p:sp>
         <p:nvSpPr>
@@ -6311,6 +6443,13 @@
           </a:solidFill>
           <a:ln/>
         </p:spPr>
+        <p:txBody>
+          <a:bodyPr/>
+          <a:lstStyle/>
+          <a:p>
+            <a:endParaRPr/>
+          </a:p>
+        </p:txBody>
       </p:sp>
       <p:sp>
         <p:nvSpPr>
@@ -6333,7 +6472,7 @@
           <a:bodyPr wrap="square" rtlCol="0" anchor="ctr"/>
           <a:lstStyle/>
           <a:p>
-            <a:pPr indent="0" marL="0">
+            <a:pPr marL="0" indent="0">
               <a:buNone/>
             </a:pPr>
             <a:r>
@@ -6369,18 +6508,9 @@
           <a:bodyPr wrap="square" rtlCol="0" anchor="ctr"/>
           <a:lstStyle/>
           <a:p>
-            <a:pPr indent="0" marL="0">
-              <a:buNone/>
-            </a:pPr>
-            <a:r>
-              <a:rPr lang="en-US" sz="1000" dirty="0">
-                <a:solidFill>
-                  <a:srgbClr val="E6EDF3"/>
-                </a:solidFill>
-              </a:rPr>
-              <a:t>Zero runtime cost—same as hand-written switch</a:t>
-            </a:r>
-            <a:endParaRPr lang="en-US" sz="1000" dirty="0"/>
+            <a:r>
+              <a:t>Designed for near-zero overhead; benchmark if this is a hot path</a:t>
+            </a:r>
           </a:p>
         </p:txBody>
       </p:sp>
@@ -6405,7 +6535,7 @@
           <a:bodyPr wrap="square" rtlCol="0" anchor="ctr"/>
           <a:lstStyle/>
           <a:p>
-            <a:pPr algn="ctr" indent="0" marL="0">
+            <a:pPr marL="0" indent="0" algn="ctr">
               <a:buNone/>
             </a:pPr>
             <a:r>
@@ -6724,4 +6854,319 @@
     </a:ext>
   </a:extLst>
 </a:theme>
+</file>
+
+<file path=ppt/theme/theme2.xml><?xml version="1.0" encoding="utf-8"?>
+<a:theme xmlns:a="http://schemas.openxmlformats.org/drawingml/2006/main" name="Office Theme">
+  <a:themeElements>
+    <a:clrScheme name="Office">
+      <a:dk1>
+        <a:sysClr val="windowText" lastClr="000000"/>
+      </a:dk1>
+      <a:lt1>
+        <a:sysClr val="window" lastClr="FFFFFF"/>
+      </a:lt1>
+      <a:dk2>
+        <a:srgbClr val="0E2841"/>
+      </a:dk2>
+      <a:lt2>
+        <a:srgbClr val="E8E8E8"/>
+      </a:lt2>
+      <a:accent1>
+        <a:srgbClr val="156082"/>
+      </a:accent1>
+      <a:accent2>
+        <a:srgbClr val="E97132"/>
+      </a:accent2>
+      <a:accent3>
+        <a:srgbClr val="196B24"/>
+      </a:accent3>
+      <a:accent4>
+        <a:srgbClr val="0F9ED5"/>
+      </a:accent4>
+      <a:accent5>
+        <a:srgbClr val="A02B93"/>
+      </a:accent5>
+      <a:accent6>
+        <a:srgbClr val="4EA72E"/>
+      </a:accent6>
+      <a:hlink>
+        <a:srgbClr val="467886"/>
+      </a:hlink>
+      <a:folHlink>
+        <a:srgbClr val="96607D"/>
+      </a:folHlink>
+    </a:clrScheme>
+    <a:fontScheme name="Office">
+      <a:majorFont>
+        <a:latin typeface="Aptos Display" panose="02110004020202020204"/>
+        <a:ea typeface=""/>
+        <a:cs typeface=""/>
+        <a:font script="Jpan" typeface="游ゴシック Light"/>
+        <a:font script="Hang" typeface="맑은 고딕"/>
+        <a:font script="Hans" typeface="等线 Light"/>
+        <a:font script="Hant" typeface="新細明體"/>
+        <a:font script="Arab" typeface="Times New Roman"/>
+        <a:font script="Hebr" typeface="Times New Roman"/>
+        <a:font script="Thai" typeface="Angsana New"/>
+        <a:font script="Ethi" typeface="Nyala"/>
+        <a:font script="Beng" typeface="Vrinda"/>
+        <a:font script="Gujr" typeface="Shruti"/>
+        <a:font script="Khmr" typeface="MoolBoran"/>
+        <a:font script="Knda" typeface="Tunga"/>
+        <a:font script="Guru" typeface="Raavi"/>
+        <a:font script="Cans" typeface="Euphemia"/>
+        <a:font script="Cher" typeface="Plantagenet Cherokee"/>
+        <a:font script="Yiii" typeface="Microsoft Yi Baiti"/>
+        <a:font script="Tibt" typeface="Microsoft Himalaya"/>
+        <a:font script="Thaa" typeface="MV Boli"/>
+        <a:font script="Deva" typeface="Mangal"/>
+        <a:font script="Telu" typeface="Gautami"/>
+        <a:font script="Taml" typeface="Latha"/>
+        <a:font script="Syrc" typeface="Estrangelo Edessa"/>
+        <a:font script="Orya" typeface="Kalinga"/>
+        <a:font script="Mlym" typeface="Kartika"/>
+        <a:font script="Laoo" typeface="DokChampa"/>
+        <a:font script="Sinh" typeface="Iskoola Pota"/>
+        <a:font script="Mong" typeface="Mongolian Baiti"/>
+        <a:font script="Viet" typeface="Times New Roman"/>
+        <a:font script="Uigh" typeface="Microsoft Uighur"/>
+        <a:font script="Geor" typeface="Sylfaen"/>
+        <a:font script="Armn" typeface="Arial"/>
+        <a:font script="Bugi" typeface="Leelawadee UI"/>
+        <a:font script="Bopo" typeface="Microsoft JhengHei"/>
+        <a:font script="Java" typeface="Javanese Text"/>
+        <a:font script="Lisu" typeface="Segoe UI"/>
+        <a:font script="Mymr" typeface="Myanmar Text"/>
+        <a:font script="Nkoo" typeface="Ebrima"/>
+        <a:font script="Olck" typeface="Nirmala UI"/>
+        <a:font script="Osma" typeface="Ebrima"/>
+        <a:font script="Phag" typeface="Phagspa"/>
+        <a:font script="Syrn" typeface="Estrangelo Edessa"/>
+        <a:font script="Syrj" typeface="Estrangelo Edessa"/>
+        <a:font script="Syre" typeface="Estrangelo Edessa"/>
+        <a:font script="Sora" typeface="Nirmala UI"/>
+        <a:font script="Tale" typeface="Microsoft Tai Le"/>
+        <a:font script="Talu" typeface="Microsoft New Tai Lue"/>
+        <a:font script="Tfng" typeface="Ebrima"/>
+      </a:majorFont>
+      <a:minorFont>
+        <a:latin typeface="Aptos" panose="02110004020202020204"/>
+        <a:ea typeface=""/>
+        <a:cs typeface=""/>
+        <a:font script="Jpan" typeface="游ゴシック"/>
+        <a:font script="Hang" typeface="맑은 고딕"/>
+        <a:font script="Hans" typeface="等线"/>
+        <a:font script="Hant" typeface="新細明體"/>
+        <a:font script="Arab" typeface="Arial"/>
+        <a:font script="Hebr" typeface="Arial"/>
+        <a:font script="Thai" typeface="Cordia New"/>
+        <a:font script="Ethi" typeface="Nyala"/>
+        <a:font script="Beng" typeface="Vrinda"/>
+        <a:font script="Gujr" typeface="Shruti"/>
+        <a:font script="Khmr" typeface="DaunPenh"/>
+        <a:font script="Knda" typeface="Tunga"/>
+        <a:font script="Guru" typeface="Raavi"/>
+        <a:font script="Cans" typeface="Euphemia"/>
+        <a:font script="Cher" typeface="Plantagenet Cherokee"/>
+        <a:font script="Yiii" typeface="Microsoft Yi Baiti"/>
+        <a:font script="Tibt" typeface="Microsoft Himalaya"/>
+        <a:font script="Thaa" typeface="MV Boli"/>
+        <a:font script="Deva" typeface="Mangal"/>
+        <a:font script="Telu" typeface="Gautami"/>
+        <a:font script="Taml" typeface="Latha"/>
+        <a:font script="Syrc" typeface="Estrangelo Edessa"/>
+        <a:font script="Orya" typeface="Kalinga"/>
+        <a:font script="Mlym" typeface="Kartika"/>
+        <a:font script="Laoo" typeface="DokChampa"/>
+        <a:font script="Sinh" typeface="Iskoola Pota"/>
+        <a:font script="Mong" typeface="Mongolian Baiti"/>
+        <a:font script="Viet" typeface="Arial"/>
+        <a:font script="Uigh" typeface="Microsoft Uighur"/>
+        <a:font script="Geor" typeface="Sylfaen"/>
+        <a:font script="Armn" typeface="Arial"/>
+        <a:font script="Bugi" typeface="Leelawadee UI"/>
+        <a:font script="Bopo" typeface="Microsoft JhengHei"/>
+        <a:font script="Java" typeface="Javanese Text"/>
+        <a:font script="Lisu" typeface="Segoe UI"/>
+        <a:font script="Mymr" typeface="Myanmar Text"/>
+        <a:font script="Nkoo" typeface="Ebrima"/>
+        <a:font script="Olck" typeface="Nirmala UI"/>
+        <a:font script="Osma" typeface="Ebrima"/>
+        <a:font script="Phag" typeface="Phagspa"/>
+        <a:font script="Syrn" typeface="Estrangelo Edessa"/>
+        <a:font script="Syrj" typeface="Estrangelo Edessa"/>
+        <a:font script="Syre" typeface="Estrangelo Edessa"/>
+        <a:font script="Sora" typeface="Nirmala UI"/>
+        <a:font script="Tale" typeface="Microsoft Tai Le"/>
+        <a:font script="Talu" typeface="Microsoft New Tai Lue"/>
+        <a:font script="Tfng" typeface="Ebrima"/>
+      </a:minorFont>
+    </a:fontScheme>
+    <a:fmtScheme name="Office">
+      <a:fillStyleLst>
+        <a:solidFill>
+          <a:schemeClr val="phClr"/>
+        </a:solidFill>
+        <a:gradFill rotWithShape="1">
+          <a:gsLst>
+            <a:gs pos="0">
+              <a:schemeClr val="phClr">
+                <a:lumMod val="110000"/>
+                <a:satMod val="105000"/>
+                <a:tint val="67000"/>
+              </a:schemeClr>
+            </a:gs>
+            <a:gs pos="50000">
+              <a:schemeClr val="phClr">
+                <a:lumMod val="105000"/>
+                <a:satMod val="103000"/>
+                <a:tint val="73000"/>
+              </a:schemeClr>
+            </a:gs>
+            <a:gs pos="100000">
+              <a:schemeClr val="phClr">
+                <a:lumMod val="105000"/>
+                <a:satMod val="109000"/>
+                <a:tint val="81000"/>
+              </a:schemeClr>
+            </a:gs>
+          </a:gsLst>
+          <a:lin ang="5400000" scaled="0"/>
+        </a:gradFill>
+        <a:gradFill rotWithShape="1">
+          <a:gsLst>
+            <a:gs pos="0">
+              <a:schemeClr val="phClr">
+                <a:satMod val="103000"/>
+                <a:lumMod val="102000"/>
+                <a:tint val="94000"/>
+              </a:schemeClr>
+            </a:gs>
+            <a:gs pos="50000">
+              <a:schemeClr val="phClr">
+                <a:satMod val="110000"/>
+                <a:lumMod val="100000"/>
+                <a:shade val="100000"/>
+              </a:schemeClr>
+            </a:gs>
+            <a:gs pos="100000">
+              <a:schemeClr val="phClr">
+                <a:lumMod val="99000"/>
+                <a:satMod val="120000"/>
+                <a:shade val="78000"/>
+              </a:schemeClr>
+            </a:gs>
+          </a:gsLst>
+          <a:lin ang="5400000" scaled="0"/>
+        </a:gradFill>
+      </a:fillStyleLst>
+      <a:lnStyleLst>
+        <a:ln w="12700" cap="flat" cmpd="sng" algn="ctr">
+          <a:solidFill>
+            <a:schemeClr val="phClr"/>
+          </a:solidFill>
+          <a:prstDash val="solid"/>
+          <a:miter lim="800000"/>
+        </a:ln>
+        <a:ln w="19050" cap="flat" cmpd="sng" algn="ctr">
+          <a:solidFill>
+            <a:schemeClr val="phClr"/>
+          </a:solidFill>
+          <a:prstDash val="solid"/>
+          <a:miter lim="800000"/>
+        </a:ln>
+        <a:ln w="25400" cap="flat" cmpd="sng" algn="ctr">
+          <a:solidFill>
+            <a:schemeClr val="phClr"/>
+          </a:solidFill>
+          <a:prstDash val="solid"/>
+          <a:miter lim="800000"/>
+        </a:ln>
+      </a:lnStyleLst>
+      <a:effectStyleLst>
+        <a:effectStyle>
+          <a:effectLst/>
+        </a:effectStyle>
+        <a:effectStyle>
+          <a:effectLst/>
+        </a:effectStyle>
+        <a:effectStyle>
+          <a:effectLst>
+            <a:outerShdw blurRad="57150" dist="19050" dir="5400000" algn="ctr" rotWithShape="0">
+              <a:srgbClr val="000000">
+                <a:alpha val="63000"/>
+              </a:srgbClr>
+            </a:outerShdw>
+          </a:effectLst>
+        </a:effectStyle>
+      </a:effectStyleLst>
+      <a:bgFillStyleLst>
+        <a:solidFill>
+          <a:schemeClr val="phClr"/>
+        </a:solidFill>
+        <a:solidFill>
+          <a:schemeClr val="phClr">
+            <a:tint val="95000"/>
+            <a:satMod val="170000"/>
+          </a:schemeClr>
+        </a:solidFill>
+        <a:gradFill rotWithShape="1">
+          <a:gsLst>
+            <a:gs pos="0">
+              <a:schemeClr val="phClr">
+                <a:tint val="93000"/>
+                <a:satMod val="150000"/>
+                <a:shade val="98000"/>
+                <a:lumMod val="102000"/>
+              </a:schemeClr>
+            </a:gs>
+            <a:gs pos="50000">
+              <a:schemeClr val="phClr">
+                <a:tint val="98000"/>
+                <a:satMod val="130000"/>
+                <a:shade val="90000"/>
+                <a:lumMod val="103000"/>
+              </a:schemeClr>
+            </a:gs>
+            <a:gs pos="100000">
+              <a:schemeClr val="phClr">
+                <a:shade val="63000"/>
+                <a:satMod val="120000"/>
+              </a:schemeClr>
+            </a:gs>
+          </a:gsLst>
+          <a:lin ang="5400000" scaled="0"/>
+        </a:gradFill>
+      </a:bgFillStyleLst>
+    </a:fmtScheme>
+  </a:themeElements>
+  <a:objectDefaults>
+    <a:lnDef>
+      <a:spPr/>
+      <a:bodyPr/>
+      <a:lstStyle/>
+      <a:style>
+        <a:lnRef idx="2">
+          <a:schemeClr val="accent1"/>
+        </a:lnRef>
+        <a:fillRef idx="0">
+          <a:schemeClr val="accent1"/>
+        </a:fillRef>
+        <a:effectRef idx="1">
+          <a:schemeClr val="accent1"/>
+        </a:effectRef>
+        <a:fontRef idx="minor">
+          <a:schemeClr val="tx1"/>
+        </a:fontRef>
+      </a:style>
+    </a:lnDef>
+  </a:objectDefaults>
+  <a:extraClrSchemeLst/>
+  <a:extLst>
+    <a:ext uri="{05A4C25C-085E-4340-85A3-A5531E510DB2}">
+      <thm15:themeFamily xmlns:thm15="http://schemas.microsoft.com/office/thememl/2012/main" name="Office Theme" id="{2E142A2C-CD16-42D6-873A-C26D2A0506FA}" vid="{1BDDFF52-6CD6-40A5-AB3C-68EB2F1E4D0A}"/>
+    </a:ext>
+  </a:extLst>
+</a:theme>
 </file>